--- a/progetto-snodi/corsi/edu-genai-2/incontri/03-uda-interattive.pptx
+++ b/progetto-snodi/corsi/edu-genai-2/incontri/03-uda-interattive.pptx
@@ -14,9 +14,10 @@
     <p:sldId id="262" r:id="rId8"/>
     <p:sldId id="263" r:id="rId9"/>
     <p:sldId id="264" r:id="rId10"/>
+    <p:sldId id="265" r:id="rId11"/>
   </p:sldIdLst>
   <p:notesMasterIdLst>
-    <p:notesMasterId r:id="rId11"/>
+    <p:notesMasterId r:id="rId12"/>
   </p:notesMasterIdLst>
   <p:sldSz cx="12188952" cy="6858000"/>
   <p:notesSz cx="6858000" cy="12188952"/>
@@ -552,6 +553,94 @@
 </p:notes>
 </file>
 
+<file path=ppt/notesSlides/notesSlide10.xml><?xml version="1.0" encoding="utf-8"?>
+<p:notes xmlns:a="http://schemas.openxmlformats.org/drawingml/2006/main" xmlns:r="http://schemas.openxmlformats.org/officeDocument/2006/relationships" xmlns:p="http://schemas.openxmlformats.org/presentationml/2006/main">
+  <p:cSld>
+    <p:spTree>
+      <p:nvGrpSpPr>
+        <p:cNvPr id="1" name=""/>
+        <p:cNvGrpSpPr/>
+        <p:nvPr/>
+      </p:nvGrpSpPr>
+      <p:grpSpPr>
+        <a:xfrm>
+          <a:off x="0" y="0"/>
+          <a:ext cx="0" cy="0"/>
+          <a:chOff x="0" y="0"/>
+          <a:chExt cx="0" cy="0"/>
+        </a:xfrm>
+      </p:grpSpPr>
+      <p:sp>
+        <p:nvSpPr>
+          <p:cNvPr id="2" name="Slide Image Placeholder 1"/>
+          <p:cNvSpPr>
+            <a:spLocks noGrp="1" noRot="1" noChangeAspect="1"/>
+          </p:cNvSpPr>
+          <p:nvPr>
+            <p:ph type="sldImg"/>
+          </p:nvPr>
+        </p:nvSpPr>
+        <p:spPr/>
+      </p:sp>
+      <p:sp>
+        <p:nvSpPr>
+          <p:cNvPr id="3" name="Notes Placeholder 2"/>
+          <p:cNvSpPr>
+            <a:spLocks noGrp="1"/>
+          </p:cNvSpPr>
+          <p:nvPr>
+            <p:ph type="body" idx="1"/>
+          </p:nvPr>
+        </p:nvSpPr>
+        <p:spPr/>
+        <p:txBody>
+          <a:bodyPr/>
+          <a:lstStyle/>
+          <a:p>
+            <a:r>
+              <a:rPr lang="en-US" dirty="0"/>
+              <a:t>Il caso-tipo da portare venerdì è il materiale per il laboratorio sul tutor: profilo sintetico, insistere sul divieto di persone reali.</a:t>
+            </a:r>
+            <a:endParaRPr lang="en-US" dirty="0"/>
+          </a:p>
+        </p:txBody>
+      </p:sp>
+      <p:sp>
+        <p:nvSpPr>
+          <p:cNvPr id="4" name="Slide Number Placeholder 3"/>
+          <p:cNvSpPr>
+            <a:spLocks noGrp="1"/>
+          </p:cNvSpPr>
+          <p:nvPr>
+            <p:ph type="sldNum" sz="quarter" idx="10"/>
+          </p:nvPr>
+        </p:nvSpPr>
+        <p:spPr/>
+        <p:txBody>
+          <a:bodyPr/>
+          <a:lstStyle/>
+          <a:p>
+            <a:fld id="{F7021451-1387-4CA6-816F-3879F97B5CBC}" type="slidenum">
+              <a:rPr lang="en-US"/>
+              <a:t>10</a:t>
+            </a:fld>
+            <a:endParaRPr lang="en-US"/>
+          </a:p>
+        </p:txBody>
+      </p:sp>
+    </p:spTree>
+    <p:extLst>
+      <p:ext uri="{BB962C8B-B14F-4D97-AF65-F5344CB8AC3E}">
+        <p14:creationId xmlns:p14="http://schemas.microsoft.com/office/powerpoint/2010/main" val="1024086991"/>
+      </p:ext>
+    </p:extLst>
+  </p:cSld>
+  <p:clrMapOvr>
+    <a:masterClrMapping/>
+  </p:clrMapOvr>
+</p:notes>
+</file>
+
 <file path=ppt/notesSlides/notesSlide2.xml><?xml version="1.0" encoding="utf-8"?>
 <p:notes xmlns:a="http://schemas.openxmlformats.org/drawingml/2006/main" xmlns:r="http://schemas.openxmlformats.org/officeDocument/2006/relationships" xmlns:p="http://schemas.openxmlformats.org/presentationml/2006/main">
   <p:cSld>
@@ -1214,7 +1303,7 @@
           <a:p>
             <a:r>
               <a:rPr lang="en-US" dirty="0"/>
-              <a:t>Il caso-tipo da portare venerdì è il materiale per il laboratorio sul tutor: profilo sintetico, insistere sul divieto di persone reali.</a:t>
+              <a:t>Correzione onesta da fare a voce: il GEM 2026 non contiene IA — si usa come lente di equità per il design delle UdA; per la tecnologia il riferimento GEM è il 2023. Raccogliere le osservazioni di chi ha seguito una plenaria della DLW (che è in corso in questi giorni).</a:t>
             </a:r>
             <a:endParaRPr lang="en-US" dirty="0"/>
           </a:p>
@@ -1871,6 +1960,242 @@
 </p:sld>
 </file>
 
+<file path=ppt/slides/slide10.xml><?xml version="1.0" encoding="utf-8"?>
+<p:sld xmlns:a="http://schemas.openxmlformats.org/drawingml/2006/main" xmlns:r="http://schemas.openxmlformats.org/officeDocument/2006/relationships" xmlns:p="http://schemas.openxmlformats.org/presentationml/2006/main">
+  <p:cSld name="Slide 10">
+    <p:bg>
+      <p:bgPr>
+        <a:solidFill>
+          <a:srgbClr val="1E2761"/>
+        </a:solidFill>
+      </p:bgPr>
+    </p:bg>
+    <p:spTree>
+      <p:nvGrpSpPr>
+        <p:cNvPr id="1" name=""/>
+        <p:cNvGrpSpPr/>
+        <p:nvPr/>
+      </p:nvGrpSpPr>
+      <p:grpSpPr>
+        <a:xfrm>
+          <a:off x="0" y="0"/>
+          <a:ext cx="0" cy="0"/>
+          <a:chOff x="0" y="0"/>
+          <a:chExt cx="0" cy="0"/>
+        </a:xfrm>
+      </p:grpSpPr>
+      <p:sp>
+        <p:nvSpPr>
+          <p:cNvPr id="2" name="Text 0"/>
+          <p:cNvSpPr/>
+          <p:nvPr/>
+        </p:nvSpPr>
+        <p:spPr>
+          <a:xfrm>
+            <a:off x="822960" y="731520"/>
+            <a:ext cx="10515600" cy="640080"/>
+          </a:xfrm>
+          <a:prstGeom prst="rect">
+            <a:avLst/>
+          </a:prstGeom>
+          <a:noFill/>
+          <a:ln/>
+        </p:spPr>
+        <p:txBody>
+          <a:bodyPr wrap="square" lIns="0" tIns="0" rIns="0" bIns="0" rtlCol="0" anchor="ctr"/>
+          <a:lstStyle/>
+          <a:p>
+            <a:pPr indent="0" marL="0">
+              <a:buNone/>
+            </a:pPr>
+            <a:r>
+              <a:rPr lang="en-US" sz="3400" b="1" dirty="0">
+                <a:solidFill>
+                  <a:srgbClr val="FFFFFF"/>
+                </a:solidFill>
+                <a:latin typeface="Cambria" pitchFamily="34" charset="0"/>
+                <a:ea typeface="Cambria" pitchFamily="34" charset="-122"/>
+                <a:cs typeface="Cambria" pitchFamily="34" charset="-120"/>
+              </a:rPr>
+              <a:t>Per il prossimo incontro</a:t>
+            </a:r>
+            <a:endParaRPr lang="en-US" sz="3400" dirty="0"/>
+          </a:p>
+        </p:txBody>
+      </p:sp>
+      <p:sp>
+        <p:nvSpPr>
+          <p:cNvPr id="3" name="Text 1"/>
+          <p:cNvSpPr/>
+          <p:nvPr/>
+        </p:nvSpPr>
+        <p:spPr>
+          <a:xfrm>
+            <a:off x="822960" y="1645920"/>
+            <a:ext cx="10515600" cy="3108960"/>
+          </a:xfrm>
+          <a:prstGeom prst="rect">
+            <a:avLst/>
+          </a:prstGeom>
+          <a:noFill/>
+          <a:ln/>
+        </p:spPr>
+        <p:txBody>
+          <a:bodyPr wrap="square" lIns="0" tIns="0" rIns="0" bIns="0" rtlCol="0" anchor="t"/>
+          <a:lstStyle/>
+          <a:p>
+            <a:pPr marL="177800" indent="-177800">
+              <a:spcAft>
+                <a:spcPts val="1000"/>
+              </a:spcAft>
+              <a:buSzPct val="100000"/>
+              <a:buChar char="•"/>
+            </a:pPr>
+            <a:r>
+              <a:rPr lang="en-US" sz="1600" dirty="0">
+                <a:solidFill>
+                  <a:srgbClr val="FFFFFF"/>
+                </a:solidFill>
+                <a:latin typeface="Calibri" pitchFamily="34" charset="0"/>
+                <a:ea typeface="Calibri" pitchFamily="34" charset="-122"/>
+                <a:cs typeface="Calibri" pitchFamily="34" charset="-120"/>
+              </a:rPr>
+              <a:t>Completare i campi 1-4 del canvas entro venerdì (compito autentico definito)</a:t>
+            </a:r>
+            <a:endParaRPr lang="en-US" sz="1600" dirty="0"/>
+          </a:p>
+          <a:p>
+            <a:pPr marL="177800" indent="-177800">
+              <a:spcAft>
+                <a:spcPts val="1000"/>
+              </a:spcAft>
+              <a:buSzPct val="100000"/>
+              <a:buChar char="•"/>
+            </a:pPr>
+            <a:r>
+              <a:rPr lang="en-US" sz="1600" dirty="0">
+                <a:solidFill>
+                  <a:srgbClr val="FFFFFF"/>
+                </a:solidFill>
+                <a:latin typeface="Calibri" pitchFamily="34" charset="0"/>
+                <a:ea typeface="Calibri" pitchFamily="34" charset="-122"/>
+                <a:cs typeface="Calibri" pitchFamily="34" charset="-120"/>
+              </a:rPr>
+              <a:t>Portare venerdì: un caso-tipo di studente in difficoltà sul vostro argomento (profilo sintetico, non persona reale)</a:t>
+            </a:r>
+            <a:endParaRPr lang="en-US" sz="1600" dirty="0"/>
+          </a:p>
+          <a:p>
+            <a:pPr marL="177800" indent="-177800">
+              <a:spcAft>
+                <a:spcPts val="1000"/>
+              </a:spcAft>
+              <a:buSzPct val="100000"/>
+              <a:buChar char="•"/>
+            </a:pPr>
+            <a:r>
+              <a:rPr lang="en-US" sz="1600" dirty="0">
+                <a:solidFill>
+                  <a:srgbClr val="FFFFFF"/>
+                </a:solidFill>
+                <a:latin typeface="Calibri" pitchFamily="34" charset="0"/>
+                <a:ea typeface="Calibri" pitchFamily="34" charset="-122"/>
+                <a:cs typeface="Calibri" pitchFamily="34" charset="-120"/>
+              </a:rPr>
+              <a:t>Facoltativo: DigCompEdu Area 3 — i descrittori sono il linguaggio del vostro attestato</a:t>
+            </a:r>
+            <a:endParaRPr lang="en-US" sz="1600" dirty="0"/>
+          </a:p>
+        </p:txBody>
+      </p:sp>
+      <p:sp>
+        <p:nvSpPr>
+          <p:cNvPr id="4" name="Shape 2"/>
+          <p:cNvSpPr/>
+          <p:nvPr/>
+        </p:nvSpPr>
+        <p:spPr>
+          <a:xfrm>
+            <a:off x="822960" y="4937760"/>
+            <a:ext cx="10515600" cy="1188720"/>
+          </a:xfrm>
+          <a:prstGeom prst="roundRect">
+            <a:avLst>
+              <a:gd name="adj" fmla="val 6923"/>
+            </a:avLst>
+          </a:prstGeom>
+          <a:solidFill>
+            <a:srgbClr val="CADCFC"/>
+          </a:solidFill>
+          <a:ln w="12700">
+            <a:solidFill>
+              <a:srgbClr val="CADCFC"/>
+            </a:solidFill>
+            <a:prstDash val="solid"/>
+          </a:ln>
+        </p:spPr>
+      </p:sp>
+      <p:sp>
+        <p:nvSpPr>
+          <p:cNvPr id="5" name="Text 3"/>
+          <p:cNvSpPr/>
+          <p:nvPr/>
+        </p:nvSpPr>
+        <p:spPr>
+          <a:xfrm>
+            <a:off x="1097280" y="4937760"/>
+            <a:ext cx="9966960" cy="1188720"/>
+          </a:xfrm>
+          <a:prstGeom prst="rect">
+            <a:avLst/>
+          </a:prstGeom>
+          <a:noFill/>
+          <a:ln/>
+        </p:spPr>
+        <p:txBody>
+          <a:bodyPr wrap="square" lIns="0" tIns="0" rIns="0" bIns="0" rtlCol="0" anchor="ctr"/>
+          <a:lstStyle/>
+          <a:p>
+            <a:pPr indent="0" marL="0">
+              <a:buNone/>
+            </a:pPr>
+            <a:r>
+              <a:rPr lang="en-US" sz="1600" b="1" dirty="0">
+                <a:solidFill>
+                  <a:srgbClr val="1E2761"/>
+                </a:solidFill>
+                <a:latin typeface="Cambria" pitchFamily="34" charset="0"/>
+                <a:ea typeface="Cambria" pitchFamily="34" charset="-122"/>
+                <a:cs typeface="Cambria" pitchFamily="34" charset="-120"/>
+              </a:rPr>
+              <a:t>Incontro 4 — venerdì 11 settembre:  </a:t>
+            </a:r>
+            <a:pPr indent="0" marL="0">
+              <a:buNone/>
+            </a:pPr>
+            <a:r>
+              <a:rPr lang="en-US" sz="1400" dirty="0">
+                <a:solidFill>
+                  <a:srgbClr val="26303B"/>
+                </a:solidFill>
+                <a:latin typeface="Calibri" pitchFamily="34" charset="0"/>
+                <a:ea typeface="Calibri" pitchFamily="34" charset="-122"/>
+                <a:cs typeface="Calibri" pitchFamily="34" charset="-120"/>
+              </a:rPr>
+              <a:t>Scaffolding mediato e personalizzazione: il tutor socratico, i profili BES/DSA, e l'evidenza su cosa funziona davvero.</a:t>
+            </a:r>
+            <a:endParaRPr lang="en-US" sz="1600" dirty="0"/>
+          </a:p>
+        </p:txBody>
+      </p:sp>
+    </p:spTree>
+  </p:cSld>
+  <p:clrMapOvr>
+    <a:masterClrMapping/>
+  </p:clrMapOvr>
+</p:sld>
+</file>
+
 <file path=ppt/slides/slide2.xml><?xml version="1.0" encoding="utf-8"?>
 <p:sld xmlns:a="http://schemas.openxmlformats.org/drawingml/2006/main" xmlns:r="http://schemas.openxmlformats.org/officeDocument/2006/relationships" xmlns:p="http://schemas.openxmlformats.org/presentationml/2006/main">
   <p:cSld name="Slide 2">
@@ -3804,7 +4129,7 @@
                 <a:ea typeface="Calibri" pitchFamily="34" charset="-122"/>
                 <a:cs typeface="Calibri" pitchFamily="34" charset="-120"/>
               </a:rPr>
-              <a:t>Fasi di lavoro: per ciascuna, dichiarato SE l'IA entra, COME, e con quale regola d'uso per gli studenti</a:t>
+              <a:t>Fasi di lavoro: per ciascuna, dichiarato SE l'IA entra, COME, e con quale regola d'uso — sulla scala UNESCO-TVET: AI-independent → aware → supported → enhanced → centric</a:t>
             </a:r>
             <a:endParaRPr lang="en-US" sz="1500" dirty="0"/>
           </a:p>
@@ -6064,7 +6389,7 @@
     <p:bg>
       <p:bgPr>
         <a:solidFill>
-          <a:srgbClr val="1E2761"/>
+          <a:srgbClr val="FFFFFF"/>
         </a:solidFill>
       </p:bgPr>
     </p:bg>
@@ -6084,14 +6409,39 @@
       </p:grpSpPr>
       <p:sp>
         <p:nvSpPr>
-          <p:cNvPr id="2" name="Text 0"/>
-          <p:cNvSpPr/>
-          <p:nvPr/>
-        </p:nvSpPr>
-        <p:spPr>
-          <a:xfrm>
-            <a:off x="822960" y="731520"/>
-            <a:ext cx="10515600" cy="640080"/>
+          <p:cNvPr id="2" name="Shape 0"/>
+          <p:cNvSpPr/>
+          <p:nvPr/>
+        </p:nvSpPr>
+        <p:spPr>
+          <a:xfrm>
+            <a:off x="502920" y="384048"/>
+            <a:ext cx="566928" cy="566928"/>
+          </a:xfrm>
+          <a:prstGeom prst="ellipse">
+            <a:avLst/>
+          </a:prstGeom>
+          <a:solidFill>
+            <a:srgbClr val="1E2761"/>
+          </a:solidFill>
+          <a:ln w="12700">
+            <a:solidFill>
+              <a:srgbClr val="1E2761"/>
+            </a:solidFill>
+            <a:prstDash val="solid"/>
+          </a:ln>
+        </p:spPr>
+      </p:sp>
+      <p:sp>
+        <p:nvSpPr>
+          <p:cNvPr id="3" name="Text 1"/>
+          <p:cNvSpPr/>
+          <p:nvPr/>
+        </p:nvSpPr>
+        <p:spPr>
+          <a:xfrm>
+            <a:off x="502920" y="384048"/>
+            <a:ext cx="566928" cy="566928"/>
           </a:xfrm>
           <a:prstGeom prst="rect">
             <a:avLst/>
@@ -6103,11 +6453,11 @@
           <a:bodyPr wrap="square" lIns="0" tIns="0" rIns="0" bIns="0" rtlCol="0" anchor="ctr"/>
           <a:lstStyle/>
           <a:p>
-            <a:pPr indent="0" marL="0">
-              <a:buNone/>
-            </a:pPr>
-            <a:r>
-              <a:rPr lang="en-US" sz="3400" b="1" dirty="0">
+            <a:pPr algn="ctr" indent="0" marL="0">
+              <a:buNone/>
+            </a:pPr>
+            <a:r>
+              <a:rPr lang="en-US" sz="1800" b="1" dirty="0">
                 <a:solidFill>
                   <a:srgbClr val="FFFFFF"/>
                 </a:solidFill>
@@ -6115,22 +6465,100 @@
                 <a:ea typeface="Cambria" pitchFamily="34" charset="-122"/>
                 <a:cs typeface="Cambria" pitchFamily="34" charset="-120"/>
               </a:rPr>
-              <a:t>Per il prossimo incontro</a:t>
-            </a:r>
-            <a:endParaRPr lang="en-US" sz="3400" dirty="0"/>
-          </a:p>
-        </p:txBody>
-      </p:sp>
-      <p:sp>
-        <p:nvSpPr>
-          <p:cNvPr id="3" name="Text 1"/>
-          <p:cNvSpPr/>
-          <p:nvPr/>
-        </p:nvSpPr>
-        <p:spPr>
-          <a:xfrm>
-            <a:off x="822960" y="1645920"/>
-            <a:ext cx="10515600" cy="3108960"/>
+              <a:t>3</a:t>
+            </a:r>
+            <a:endParaRPr lang="en-US" sz="1800" dirty="0"/>
+          </a:p>
+        </p:txBody>
+      </p:sp>
+      <p:sp>
+        <p:nvSpPr>
+          <p:cNvPr id="4" name="Text 2"/>
+          <p:cNvSpPr/>
+          <p:nvPr/>
+        </p:nvSpPr>
+        <p:spPr>
+          <a:xfrm>
+            <a:off x="1234440" y="347472"/>
+            <a:ext cx="9601200" cy="274320"/>
+          </a:xfrm>
+          <a:prstGeom prst="rect">
+            <a:avLst/>
+          </a:prstGeom>
+          <a:noFill/>
+          <a:ln/>
+        </p:spPr>
+        <p:txBody>
+          <a:bodyPr wrap="square" lIns="0" tIns="0" rIns="0" bIns="0" rtlCol="0" anchor="ctr"/>
+          <a:lstStyle/>
+          <a:p>
+            <a:pPr indent="0" marL="0">
+              <a:buNone/>
+            </a:pPr>
+            <a:r>
+              <a:rPr lang="en-US" sz="1100" dirty="0">
+                <a:solidFill>
+                  <a:srgbClr val="5B6B7C"/>
+                </a:solidFill>
+                <a:latin typeface="Calibri" pitchFamily="34" charset="0"/>
+                <a:ea typeface="Calibri" pitchFamily="34" charset="-122"/>
+                <a:cs typeface="Calibri" pitchFamily="34" charset="-120"/>
+              </a:rPr>
+              <a:t>Edu-GenAI 2 — Didattica Aumentata e Data Literacy</a:t>
+            </a:r>
+            <a:endParaRPr lang="en-US" sz="1100" dirty="0"/>
+          </a:p>
+        </p:txBody>
+      </p:sp>
+      <p:sp>
+        <p:nvSpPr>
+          <p:cNvPr id="5" name="Text 3"/>
+          <p:cNvSpPr/>
+          <p:nvPr/>
+        </p:nvSpPr>
+        <p:spPr>
+          <a:xfrm>
+            <a:off x="1234440" y="566928"/>
+            <a:ext cx="10332720" cy="685800"/>
+          </a:xfrm>
+          <a:prstGeom prst="rect">
+            <a:avLst/>
+          </a:prstGeom>
+          <a:noFill/>
+          <a:ln/>
+        </p:spPr>
+        <p:txBody>
+          <a:bodyPr wrap="square" lIns="0" tIns="0" rIns="0" bIns="0" rtlCol="0" anchor="ctr"/>
+          <a:lstStyle/>
+          <a:p>
+            <a:pPr indent="0" marL="0">
+              <a:buNone/>
+            </a:pPr>
+            <a:r>
+              <a:rPr lang="en-US" sz="3000" b="1" dirty="0">
+                <a:solidFill>
+                  <a:srgbClr val="1E2761"/>
+                </a:solidFill>
+                <a:latin typeface="Cambria" pitchFamily="34" charset="0"/>
+                <a:ea typeface="Cambria" pitchFamily="34" charset="-122"/>
+                <a:cs typeface="Cambria" pitchFamily="34" charset="-120"/>
+              </a:rPr>
+              <a:t>Bussola internazionale 2026</a:t>
+            </a:r>
+            <a:endParaRPr lang="en-US" sz="3000" dirty="0"/>
+          </a:p>
+        </p:txBody>
+      </p:sp>
+      <p:sp>
+        <p:nvSpPr>
+          <p:cNvPr id="6" name="Text 4"/>
+          <p:cNvSpPr/>
+          <p:nvPr/>
+        </p:nvSpPr>
+        <p:spPr>
+          <a:xfrm>
+            <a:off x="822960" y="1600200"/>
+            <a:ext cx="6492240" cy="4754880"/>
           </a:xfrm>
           <a:prstGeom prst="rect">
             <a:avLst/>
@@ -6144,90 +6572,90 @@
           <a:p>
             <a:pPr marL="177800" indent="-177800">
               <a:spcAft>
-                <a:spcPts val="1000"/>
+                <a:spcPts val="800"/>
               </a:spcAft>
               <a:buSzPct val="100000"/>
               <a:buChar char="•"/>
             </a:pPr>
             <a:r>
-              <a:rPr lang="en-US" sz="1600" dirty="0">
-                <a:solidFill>
-                  <a:srgbClr val="FFFFFF"/>
-                </a:solidFill>
-                <a:latin typeface="Calibri" pitchFamily="34" charset="0"/>
-                <a:ea typeface="Calibri" pitchFamily="34" charset="-122"/>
-                <a:cs typeface="Calibri" pitchFamily="34" charset="-120"/>
-              </a:rPr>
-              <a:t>Completare i campi 1-4 del canvas entro venerdì (compito autentico definito)</a:t>
-            </a:r>
-            <a:endParaRPr lang="en-US" sz="1600" dirty="0"/>
+              <a:rPr lang="en-US" sz="1500" b="1" dirty="0">
+                <a:solidFill>
+                  <a:srgbClr val="26303B"/>
+                </a:solidFill>
+                <a:latin typeface="Calibri" pitchFamily="34" charset="0"/>
+                <a:ea typeface="Calibri" pitchFamily="34" charset="-122"/>
+                <a:cs typeface="Calibri" pitchFamily="34" charset="-120"/>
+              </a:rPr>
+              <a:t>UNESCO GEM Report 2026 (Access and equity): progettare percorsi inclusivi non è un di più — «meno di 1 paese su 10 ha politiche con un focus di equità sufficiente». Le vostre UdA possono fare meglio delle policy</a:t>
+            </a:r>
+            <a:endParaRPr lang="en-US" sz="1500" dirty="0"/>
           </a:p>
           <a:p>
             <a:pPr marL="177800" indent="-177800">
               <a:spcAft>
-                <a:spcPts val="1000"/>
+                <a:spcPts val="800"/>
               </a:spcAft>
               <a:buSzPct val="100000"/>
               <a:buChar char="•"/>
             </a:pPr>
             <a:r>
-              <a:rPr lang="en-US" sz="1600" dirty="0">
-                <a:solidFill>
-                  <a:srgbClr val="FFFFFF"/>
-                </a:solidFill>
-                <a:latin typeface="Calibri" pitchFamily="34" charset="0"/>
-                <a:ea typeface="Calibri" pitchFamily="34" charset="-122"/>
-                <a:cs typeface="Calibri" pitchFamily="34" charset="-120"/>
-              </a:rPr>
-              <a:t>Portare venerdì: un caso-tipo di studente in difficoltà sul vostro argomento (profilo sintetico, non persona reale)</a:t>
-            </a:r>
-            <a:endParaRPr lang="en-US" sz="1600" dirty="0"/>
+              <a:rPr lang="en-US" sz="1500" dirty="0">
+                <a:solidFill>
+                  <a:srgbClr val="26303B"/>
+                </a:solidFill>
+                <a:latin typeface="Calibri" pitchFamily="34" charset="0"/>
+                <a:ea typeface="Calibri" pitchFamily="34" charset="-122"/>
+                <a:cs typeface="Calibri" pitchFamily="34" charset="-120"/>
+              </a:rPr>
+              <a:t>UNESCO-UNEVOC — Integrating AI in TVET (2026): la scala dei 5 livelli di coinvolgimento IA che avete nel canvas viene da qui — con l'avvertenza: sulle competenze fondamentali, prima la padronanza senza IA</a:t>
+            </a:r>
+            <a:endParaRPr lang="en-US" sz="1500" dirty="0"/>
           </a:p>
           <a:p>
             <a:pPr marL="177800" indent="-177800">
               <a:spcAft>
-                <a:spcPts val="1000"/>
+                <a:spcPts val="800"/>
               </a:spcAft>
               <a:buSzPct val="100000"/>
               <a:buChar char="•"/>
             </a:pPr>
             <a:r>
-              <a:rPr lang="en-US" sz="1600" dirty="0">
-                <a:solidFill>
-                  <a:srgbClr val="FFFFFF"/>
-                </a:solidFill>
-                <a:latin typeface="Calibri" pitchFamily="34" charset="0"/>
-                <a:ea typeface="Calibri" pitchFamily="34" charset="-122"/>
-                <a:cs typeface="Calibri" pitchFamily="34" charset="-120"/>
-              </a:rPr>
-              <a:t>Facoltativo: DigCompEdu Area 3 — i descrittori sono il linguaggio del vostro attestato</a:t>
-            </a:r>
-            <a:endParaRPr lang="en-US" sz="1600" dirty="0"/>
-          </a:p>
-        </p:txBody>
-      </p:sp>
-      <p:sp>
-        <p:nvSpPr>
-          <p:cNvPr id="4" name="Shape 2"/>
-          <p:cNvSpPr/>
-          <p:nvPr/>
-        </p:nvSpPr>
-        <p:spPr>
-          <a:xfrm>
-            <a:off x="822960" y="4937760"/>
-            <a:ext cx="10515600" cy="1188720"/>
+              <a:rPr lang="en-US" sz="1500" dirty="0">
+                <a:solidFill>
+                  <a:srgbClr val="26303B"/>
+                </a:solidFill>
+                <a:latin typeface="Calibri" pitchFamily="34" charset="0"/>
+                <a:ea typeface="Calibri" pitchFamily="34" charset="-122"/>
+                <a:cs typeface="Calibri" pitchFamily="34" charset="-120"/>
+              </a:rPr>
+              <a:t>WEF 2025 (via UNESCO-TVET): fino al 39% delle competenze chiave si trasformerà entro il 2030 — i compiti autentici che progettate oggi preparano a quel mondo</a:t>
+            </a:r>
+            <a:endParaRPr lang="en-US" sz="1500" dirty="0"/>
+          </a:p>
+        </p:txBody>
+      </p:sp>
+      <p:sp>
+        <p:nvSpPr>
+          <p:cNvPr id="7" name="Shape 5"/>
+          <p:cNvSpPr/>
+          <p:nvPr/>
+        </p:nvSpPr>
+        <p:spPr>
+          <a:xfrm>
+            <a:off x="7635240" y="1600200"/>
+            <a:ext cx="3977640" cy="4480560"/>
           </a:xfrm>
           <a:prstGeom prst="roundRect">
             <a:avLst>
-              <a:gd name="adj" fmla="val 6923"/>
+              <a:gd name="adj" fmla="val 2069"/>
             </a:avLst>
           </a:prstGeom>
           <a:solidFill>
-            <a:srgbClr val="CADCFC"/>
+            <a:srgbClr val="E9F1FB"/>
           </a:solidFill>
           <a:ln w="12700">
             <a:solidFill>
-              <a:srgbClr val="CADCFC"/>
+              <a:srgbClr val="E9F1FB"/>
             </a:solidFill>
             <a:prstDash val="solid"/>
           </a:ln>
@@ -6235,14 +6663,14 @@
       </p:sp>
       <p:sp>
         <p:nvSpPr>
-          <p:cNvPr id="5" name="Text 3"/>
-          <p:cNvSpPr/>
-          <p:nvPr/>
-        </p:nvSpPr>
-        <p:spPr>
-          <a:xfrm>
-            <a:off x="1097280" y="4937760"/>
-            <a:ext cx="9966960" cy="1188720"/>
+          <p:cNvPr id="8" name="Text 6"/>
+          <p:cNvSpPr/>
+          <p:nvPr/>
+        </p:nvSpPr>
+        <p:spPr>
+          <a:xfrm>
+            <a:off x="7863840" y="1764792"/>
+            <a:ext cx="3520440" cy="320040"/>
           </a:xfrm>
           <a:prstGeom prst="rect">
             <a:avLst/>
@@ -6258,7 +6686,7 @@
               <a:buNone/>
             </a:pPr>
             <a:r>
-              <a:rPr lang="en-US" sz="1600" b="1" dirty="0">
+              <a:rPr lang="en-US" sz="1450" b="1" dirty="0">
                 <a:solidFill>
                   <a:srgbClr val="1E2761"/>
                 </a:solidFill>
@@ -6266,13 +6694,42 @@
                 <a:ea typeface="Cambria" pitchFamily="34" charset="-122"/>
                 <a:cs typeface="Cambria" pitchFamily="34" charset="-120"/>
               </a:rPr>
-              <a:t>Incontro 4 — venerdì 11 settembre:  </a:t>
-            </a:r>
-            <a:pPr indent="0" marL="0">
-              <a:buNone/>
-            </a:pPr>
-            <a:r>
-              <a:rPr lang="en-US" sz="1400" dirty="0">
+              <a:t>Nota di metodo</a:t>
+            </a:r>
+            <a:endParaRPr lang="en-US" sz="1450" dirty="0"/>
+          </a:p>
+        </p:txBody>
+      </p:sp>
+      <p:sp>
+        <p:nvSpPr>
+          <p:cNvPr id="9" name="Text 7"/>
+          <p:cNvSpPr/>
+          <p:nvPr/>
+        </p:nvSpPr>
+        <p:spPr>
+          <a:xfrm>
+            <a:off x="7863840" y="2130552"/>
+            <a:ext cx="3520440" cy="3794760"/>
+          </a:xfrm>
+          <a:prstGeom prst="rect">
+            <a:avLst/>
+          </a:prstGeom>
+          <a:noFill/>
+          <a:ln/>
+        </p:spPr>
+        <p:txBody>
+          <a:bodyPr wrap="square" lIns="0" tIns="0" rIns="0" bIns="0" rtlCol="0" anchor="t"/>
+          <a:lstStyle/>
+          <a:p>
+            <a:pPr marL="152400" indent="-152400">
+              <a:spcAft>
+                <a:spcPts val="500"/>
+              </a:spcAft>
+              <a:buSzPct val="100000"/>
+              <a:buChar char="•"/>
+            </a:pPr>
+            <a:r>
+              <a:rPr lang="en-US" sz="1250" dirty="0">
                 <a:solidFill>
                   <a:srgbClr val="26303B"/>
                 </a:solidFill>
@@ -6280,9 +6737,51 @@
                 <a:ea typeface="Calibri" pitchFamily="34" charset="-122"/>
                 <a:cs typeface="Calibri" pitchFamily="34" charset="-120"/>
               </a:rPr>
-              <a:t>Scaffolding mediato e personalizzazione: il tutor socratico, i profili BES/DSA, e l'evidenza su cosa funziona davvero.</a:t>
-            </a:r>
-            <a:endParaRPr lang="en-US" sz="1600" dirty="0"/>
+              <a:t>Il GEM 2026 parla di equità, non di IA: usatelo come lente inclusiva</a:t>
+            </a:r>
+            <a:endParaRPr lang="en-US" sz="1250" dirty="0"/>
+          </a:p>
+          <a:p>
+            <a:pPr marL="152400" indent="-152400">
+              <a:spcAft>
+                <a:spcPts val="500"/>
+              </a:spcAft>
+              <a:buSzPct val="100000"/>
+              <a:buChar char="•"/>
+            </a:pPr>
+            <a:r>
+              <a:rPr lang="en-US" sz="1250" dirty="0">
+                <a:solidFill>
+                  <a:srgbClr val="26303B"/>
+                </a:solidFill>
+                <a:latin typeface="Calibri" pitchFamily="34" charset="0"/>
+                <a:ea typeface="Calibri" pitchFamily="34" charset="-122"/>
+                <a:cs typeface="Calibri" pitchFamily="34" charset="-120"/>
+              </a:rPr>
+              <a:t>L'edizione GEM sulla tecnologia è il 2023: 'A tool on whose terms?'</a:t>
+            </a:r>
+            <a:endParaRPr lang="en-US" sz="1250" dirty="0"/>
+          </a:p>
+          <a:p>
+            <a:pPr marL="152400" indent="-152400">
+              <a:spcAft>
+                <a:spcPts val="500"/>
+              </a:spcAft>
+              <a:buSzPct val="100000"/>
+              <a:buChar char="•"/>
+            </a:pPr>
+            <a:r>
+              <a:rPr lang="en-US" sz="1250" b="1" dirty="0">
+                <a:solidFill>
+                  <a:srgbClr val="26303B"/>
+                </a:solidFill>
+                <a:latin typeface="Calibri" pitchFamily="34" charset="0"/>
+                <a:ea typeface="Calibri" pitchFamily="34" charset="-122"/>
+                <a:cs typeface="Calibri" pitchFamily="34" charset="-120"/>
+              </a:rPr>
+              <a:t>Chi ha seguito la Digital Learning Week: 2 minuti di restituzione</a:t>
+            </a:r>
+            <a:endParaRPr lang="en-US" sz="1250" dirty="0"/>
           </a:p>
         </p:txBody>
       </p:sp>
